--- a/figures/fig_controller_interaction.pptx
+++ b/figures/fig_controller_interaction.pptx
@@ -4590,7 +4590,7 @@
           <a:p>
             <a:r>
               <a:rPr lang="en-US" altLang="ko-KR" sz="1100" dirty="0"/>
-              <a:t>Capture in-order</a:t>
+              <a:t>In capture order</a:t>
             </a:r>
             <a:endParaRPr lang="ko-KR" altLang="en-US" sz="1100" dirty="0"/>
           </a:p>
